--- a/exports/pptx/lessons/middle-module-12-movement-of-sun/day-07-sayana-nirayana.pptx
+++ b/exports/pptx/lessons/middle-module-12-movement-of-sun/day-07-sayana-nirayana.pptx
@@ -5151,6 +5151,554 @@
         </p:nvSpPr>
         <p:spPr>
           <a:xfrm>
+            <a:off x="406301" y="1459409"/>
+            <a:ext cx="8498026" cy="213271"/>
+          </a:xfrm>
+          <a:prstGeom prst="rect">
+            <a:avLst/>
+          </a:prstGeom>
+          <a:noFill/>
+          <a:ln/>
+        </p:spPr>
+        <p:txBody>
+          <a:bodyPr wrap="square" lIns="0" tIns="0" rIns="0" bIns="0" rtlCol="0" anchor="t"/>
+          <a:lstStyle/>
+          <a:p>
+            <a:pPr algn="l" indent="0" marL="0">
+              <a:lnSpc>
+                <a:spcPts val="1680"/>
+              </a:lnSpc>
+              <a:spcBef>
+                <a:spcPts val="300"/>
+              </a:spcBef>
+              <a:spcAft>
+                <a:spcPts val="300"/>
+              </a:spcAft>
+              <a:buNone/>
+            </a:pPr>
+            <a:r>
+              <a:rPr lang="en-US" sz="1200" i="1" dirty="0">
+                <a:solidFill>
+                  <a:srgbClr val="1C2833"/>
+                </a:solidFill>
+                <a:latin typeface="Arial" pitchFamily="34" charset="0"/>
+                <a:ea typeface="Arial" pitchFamily="34" charset="-122"/>
+                <a:cs typeface="Arial" pitchFamily="34" charset="-120"/>
+              </a:rPr>
+              <a:t>Each row: Question ·</a:t>
+            </a:r>
+            <a:pPr algn="l" indent="0" marL="0">
+              <a:lnSpc>
+                <a:spcPts val="1680"/>
+              </a:lnSpc>
+              <a:spcBef>
+                <a:spcPts val="300"/>
+              </a:spcBef>
+              <a:spcAft>
+                <a:spcPts val="300"/>
+              </a:spcAft>
+              <a:buNone/>
+            </a:pPr>
+            <a:r>
+              <a:rPr lang="en-US" sz="1200" dirty="0">
+                <a:solidFill>
+                  <a:srgbClr val="1C2833"/>
+                </a:solidFill>
+                <a:latin typeface="Arial" pitchFamily="34" charset="0"/>
+                <a:ea typeface="Arial" pitchFamily="34" charset="-122"/>
+                <a:cs typeface="Arial" pitchFamily="34" charset="-120"/>
+              </a:rPr>
+              <a:t>Sāyana</a:t>
+            </a:r>
+            <a:pPr algn="l" indent="0" marL="0">
+              <a:lnSpc>
+                <a:spcPts val="1680"/>
+              </a:lnSpc>
+              <a:spcBef>
+                <a:spcPts val="300"/>
+              </a:spcBef>
+              <a:spcAft>
+                <a:spcPts val="300"/>
+              </a:spcAft>
+              <a:buNone/>
+            </a:pPr>
+            <a:r>
+              <a:rPr lang="en-US" sz="1200" i="1" dirty="0">
+                <a:solidFill>
+                  <a:srgbClr val="1C2833"/>
+                </a:solidFill>
+                <a:latin typeface="Arial" pitchFamily="34" charset="0"/>
+                <a:ea typeface="Arial" pitchFamily="34" charset="-122"/>
+                <a:cs typeface="Arial" pitchFamily="34" charset="-120"/>
+              </a:rPr>
+              <a:t> answer ·</a:t>
+            </a:r>
+            <a:pPr algn="l" indent="0" marL="0">
+              <a:lnSpc>
+                <a:spcPts val="1680"/>
+              </a:lnSpc>
+              <a:spcBef>
+                <a:spcPts val="300"/>
+              </a:spcBef>
+              <a:spcAft>
+                <a:spcPts val="300"/>
+              </a:spcAft>
+              <a:buNone/>
+            </a:pPr>
+            <a:r>
+              <a:rPr lang="en-US" sz="1200" dirty="0">
+                <a:solidFill>
+                  <a:srgbClr val="1C2833"/>
+                </a:solidFill>
+                <a:latin typeface="Arial" pitchFamily="34" charset="0"/>
+                <a:ea typeface="Arial" pitchFamily="34" charset="-122"/>
+                <a:cs typeface="Arial" pitchFamily="34" charset="-120"/>
+              </a:rPr>
+              <a:t>Nirayana</a:t>
+            </a:r>
+            <a:pPr algn="l" indent="0" marL="0">
+              <a:lnSpc>
+                <a:spcPts val="1680"/>
+              </a:lnSpc>
+              <a:spcBef>
+                <a:spcPts val="300"/>
+              </a:spcBef>
+              <a:spcAft>
+                <a:spcPts val="300"/>
+              </a:spcAft>
+              <a:buNone/>
+            </a:pPr>
+            <a:r>
+              <a:rPr lang="en-US" sz="1200" i="1" dirty="0">
+                <a:solidFill>
+                  <a:srgbClr val="1C2833"/>
+                </a:solidFill>
+                <a:latin typeface="Arial" pitchFamily="34" charset="0"/>
+                <a:ea typeface="Arial" pitchFamily="34" charset="-122"/>
+                <a:cs typeface="Arial" pitchFamily="34" charset="-120"/>
+              </a:rPr>
+              <a:t> answer.</a:t>
+            </a:r>
+            <a:endParaRPr lang="en-US" sz="1200" dirty="0"/>
+          </a:p>
+        </p:txBody>
+      </p:sp>
+      <p:sp>
+        <p:nvSpPr>
+          <p:cNvPr id="7" name="Text 5"/>
+          <p:cNvSpPr/>
+          <p:nvPr/>
+        </p:nvSpPr>
+        <p:spPr>
+          <a:xfrm>
+            <a:off x="406301" y="1748879"/>
+            <a:ext cx="8498026" cy="213271"/>
+          </a:xfrm>
+          <a:prstGeom prst="rect">
+            <a:avLst/>
+          </a:prstGeom>
+          <a:noFill/>
+          <a:ln/>
+        </p:spPr>
+        <p:txBody>
+          <a:bodyPr wrap="square" lIns="0" tIns="0" rIns="0" bIns="0" rtlCol="0" anchor="t"/>
+          <a:lstStyle/>
+          <a:p>
+            <a:pPr algn="l" indent="0" marL="0">
+              <a:lnSpc>
+                <a:spcPts val="1680"/>
+              </a:lnSpc>
+              <a:spcBef>
+                <a:spcPts val="300"/>
+              </a:spcBef>
+              <a:spcAft>
+                <a:spcPts val="300"/>
+              </a:spcAft>
+              <a:buNone/>
+            </a:pPr>
+            <a:r>
+              <a:rPr lang="en-US" sz="1200" dirty="0">
+                <a:solidFill>
+                  <a:srgbClr val="1C2833"/>
+                </a:solidFill>
+                <a:latin typeface="Arial" pitchFamily="34" charset="0"/>
+                <a:ea typeface="Arial" pitchFamily="34" charset="-122"/>
+                <a:cs typeface="Arial" pitchFamily="34" charset="-120"/>
+              </a:rPr>
+              <a:t>– Sun in </a:t>
+            </a:r>
+            <a:pPr algn="l" indent="0" marL="0">
+              <a:lnSpc>
+                <a:spcPts val="1680"/>
+              </a:lnSpc>
+              <a:spcBef>
+                <a:spcPts val="300"/>
+              </a:spcBef>
+              <a:spcAft>
+                <a:spcPts val="300"/>
+              </a:spcAft>
+              <a:buNone/>
+            </a:pPr>
+            <a:r>
+              <a:rPr lang="en-US" sz="1200" i="1" dirty="0">
+                <a:solidFill>
+                  <a:srgbClr val="1C2833"/>
+                </a:solidFill>
+                <a:latin typeface="Arial" pitchFamily="34" charset="0"/>
+                <a:ea typeface="Arial" pitchFamily="34" charset="-122"/>
+                <a:cs typeface="Arial" pitchFamily="34" charset="-120"/>
+              </a:rPr>
+              <a:t>Meṣa</a:t>
+            </a:r>
+            <a:pPr algn="l" indent="0" marL="0">
+              <a:lnSpc>
+                <a:spcPts val="1680"/>
+              </a:lnSpc>
+              <a:spcBef>
+                <a:spcPts val="300"/>
+              </a:spcBef>
+              <a:spcAft>
+                <a:spcPts val="300"/>
+              </a:spcAft>
+              <a:buNone/>
+            </a:pPr>
+            <a:r>
+              <a:rPr lang="en-US" sz="1200" dirty="0">
+                <a:solidFill>
+                  <a:srgbClr val="1C2833"/>
+                </a:solidFill>
+                <a:latin typeface="Arial" pitchFamily="34" charset="0"/>
+                <a:ea typeface="Arial" pitchFamily="34" charset="-122"/>
+                <a:cs typeface="Arial" pitchFamily="34" charset="-120"/>
+              </a:rPr>
+              <a:t> on ... — ~21 March · ~14 April</a:t>
+            </a:r>
+            <a:endParaRPr lang="en-US" sz="1200" dirty="0"/>
+          </a:p>
+        </p:txBody>
+      </p:sp>
+      <p:sp>
+        <p:nvSpPr>
+          <p:cNvPr id="8" name="Text 6"/>
+          <p:cNvSpPr/>
+          <p:nvPr/>
+        </p:nvSpPr>
+        <p:spPr>
+          <a:xfrm>
+            <a:off x="634901" y="2051000"/>
+            <a:ext cx="8102798" cy="769441"/>
+          </a:xfrm>
+          <a:prstGeom prst="rect">
+            <a:avLst/>
+          </a:prstGeom>
+          <a:noFill/>
+          <a:ln/>
+        </p:spPr>
+        <p:txBody>
+          <a:bodyPr wrap="square" lIns="0" tIns="0" rIns="0" bIns="0" rtlCol="0" anchor="t"/>
+          <a:lstStyle/>
+          <a:p>
+            <a:pPr algn="l" marL="342900" indent="-342900">
+              <a:lnSpc>
+                <a:spcPts val="1620"/>
+              </a:lnSpc>
+              <a:spcAft>
+                <a:spcPts val="300"/>
+              </a:spcAft>
+              <a:buSzPct val="100000"/>
+              <a:buChar char="•"/>
+            </a:pPr>
+            <a:r>
+              <a:rPr lang="en-US" sz="1200" b="1" dirty="0">
+                <a:solidFill>
+                  <a:srgbClr val="1C2833"/>
+                </a:solidFill>
+                <a:latin typeface="Arial" pitchFamily="34" charset="0"/>
+                <a:ea typeface="Arial" pitchFamily="34" charset="-122"/>
+                <a:cs typeface="Arial" pitchFamily="34" charset="-120"/>
+              </a:rPr>
+              <a:t>Aligned with seasons?</a:t>
+            </a:r>
+            <a:pPr algn="l" indent="0" marL="0">
+              <a:lnSpc>
+                <a:spcPts val="1620"/>
+              </a:lnSpc>
+              <a:spcAft>
+                <a:spcPts val="300"/>
+              </a:spcAft>
+              <a:buNone/>
+            </a:pPr>
+            <a:r>
+              <a:rPr lang="en-US" sz="1200" dirty="0">
+                <a:solidFill>
+                  <a:srgbClr val="1C2833"/>
+                </a:solidFill>
+                <a:latin typeface="Arial" pitchFamily="34" charset="0"/>
+                <a:ea typeface="Arial" pitchFamily="34" charset="-122"/>
+                <a:cs typeface="Arial" pitchFamily="34" charset="-120"/>
+              </a:rPr>
+              <a:t> — Yes (by definition) · Drifts over centuries</a:t>
+            </a:r>
+            <a:endParaRPr lang="en-US" sz="1200" dirty="0"/>
+          </a:p>
+          <a:p>
+            <a:pPr algn="l" marL="342900" indent="-342900">
+              <a:lnSpc>
+                <a:spcPts val="1620"/>
+              </a:lnSpc>
+              <a:spcAft>
+                <a:spcPts val="300"/>
+              </a:spcAft>
+              <a:buSzPct val="100000"/>
+              <a:buChar char="•"/>
+            </a:pPr>
+            <a:r>
+              <a:rPr lang="en-US" sz="1200" b="1" dirty="0">
+                <a:solidFill>
+                  <a:srgbClr val="1C2833"/>
+                </a:solidFill>
+                <a:latin typeface="Arial" pitchFamily="34" charset="0"/>
+                <a:ea typeface="Arial" pitchFamily="34" charset="-122"/>
+                <a:cs typeface="Arial" pitchFamily="34" charset="-120"/>
+              </a:rPr>
+              <a:t>Aligned with stars?</a:t>
+            </a:r>
+            <a:pPr algn="l" indent="0" marL="0">
+              <a:lnSpc>
+                <a:spcPts val="1620"/>
+              </a:lnSpc>
+              <a:spcAft>
+                <a:spcPts val="300"/>
+              </a:spcAft>
+              <a:buNone/>
+            </a:pPr>
+            <a:r>
+              <a:rPr lang="en-US" sz="1200" dirty="0">
+                <a:solidFill>
+                  <a:srgbClr val="1C2833"/>
+                </a:solidFill>
+                <a:latin typeface="Arial" pitchFamily="34" charset="0"/>
+                <a:ea typeface="Arial" pitchFamily="34" charset="-122"/>
+                <a:cs typeface="Arial" pitchFamily="34" charset="-120"/>
+              </a:rPr>
+              <a:t> — Drifts over centuries · Yes (by definition)</a:t>
+            </a:r>
+            <a:endParaRPr lang="en-US" sz="1200" dirty="0"/>
+          </a:p>
+          <a:p>
+            <a:pPr algn="l" marL="342900" indent="-342900">
+              <a:lnSpc>
+                <a:spcPts val="1620"/>
+              </a:lnSpc>
+              <a:spcAft>
+                <a:spcPts val="300"/>
+              </a:spcAft>
+              <a:buSzPct val="100000"/>
+              <a:buChar char="•"/>
+            </a:pPr>
+            <a:r>
+              <a:rPr lang="en-US" sz="1200" b="1" dirty="0">
+                <a:solidFill>
+                  <a:srgbClr val="1C2833"/>
+                </a:solidFill>
+                <a:latin typeface="Arial" pitchFamily="34" charset="0"/>
+                <a:ea typeface="Arial" pitchFamily="34" charset="-122"/>
+                <a:cs typeface="Arial" pitchFamily="34" charset="-120"/>
+              </a:rPr>
+              <a:t>Used by modern astronomy?</a:t>
+            </a:r>
+            <a:pPr algn="l" indent="0" marL="0">
+              <a:lnSpc>
+                <a:spcPts val="1620"/>
+              </a:lnSpc>
+              <a:spcAft>
+                <a:spcPts val="300"/>
+              </a:spcAft>
+              <a:buNone/>
+            </a:pPr>
+            <a:r>
+              <a:rPr lang="en-US" sz="1200" dirty="0">
+                <a:solidFill>
+                  <a:srgbClr val="1C2833"/>
+                </a:solidFill>
+                <a:latin typeface="Arial" pitchFamily="34" charset="0"/>
+                <a:ea typeface="Arial" pitchFamily="34" charset="-122"/>
+                <a:cs typeface="Arial" pitchFamily="34" charset="-120"/>
+              </a:rPr>
+              <a:t> — Yes · No</a:t>
+            </a:r>
+            <a:endParaRPr lang="en-US" sz="1200" dirty="0"/>
+          </a:p>
+        </p:txBody>
+      </p:sp>
+      <p:sp>
+        <p:nvSpPr>
+          <p:cNvPr id="9" name="Text 7"/>
+          <p:cNvSpPr/>
+          <p:nvPr/>
+        </p:nvSpPr>
+        <p:spPr>
+          <a:xfrm>
+            <a:off x="406301" y="2909292"/>
+            <a:ext cx="8498026" cy="213271"/>
+          </a:xfrm>
+          <a:prstGeom prst="rect">
+            <a:avLst/>
+          </a:prstGeom>
+          <a:noFill/>
+          <a:ln/>
+        </p:spPr>
+        <p:txBody>
+          <a:bodyPr wrap="square" lIns="0" tIns="0" rIns="0" bIns="0" rtlCol="0" anchor="t"/>
+          <a:lstStyle/>
+          <a:p>
+            <a:pPr algn="l" indent="0" marL="0">
+              <a:lnSpc>
+                <a:spcPts val="1680"/>
+              </a:lnSpc>
+              <a:spcBef>
+                <a:spcPts val="300"/>
+              </a:spcBef>
+              <a:spcAft>
+                <a:spcPts val="300"/>
+              </a:spcAft>
+              <a:buNone/>
+            </a:pPr>
+            <a:r>
+              <a:rPr lang="en-US" sz="1200" dirty="0">
+                <a:solidFill>
+                  <a:srgbClr val="1C2833"/>
+                </a:solidFill>
+                <a:latin typeface="Arial" pitchFamily="34" charset="0"/>
+                <a:ea typeface="Arial" pitchFamily="34" charset="-122"/>
+                <a:cs typeface="Arial" pitchFamily="34" charset="-120"/>
+              </a:rPr>
+              <a:t>– Used by Indian </a:t>
+            </a:r>
+            <a:pPr algn="l" indent="0" marL="0">
+              <a:lnSpc>
+                <a:spcPts val="1680"/>
+              </a:lnSpc>
+              <a:spcBef>
+                <a:spcPts val="300"/>
+              </a:spcBef>
+              <a:spcAft>
+                <a:spcPts val="300"/>
+              </a:spcAft>
+              <a:buNone/>
+            </a:pPr>
+            <a:r>
+              <a:rPr lang="en-US" sz="1200" i="1" dirty="0">
+                <a:solidFill>
+                  <a:srgbClr val="1C2833"/>
+                </a:solidFill>
+                <a:latin typeface="Arial" pitchFamily="34" charset="0"/>
+                <a:ea typeface="Arial" pitchFamily="34" charset="-122"/>
+                <a:cs typeface="Arial" pitchFamily="34" charset="-120"/>
+              </a:rPr>
+              <a:t>pañcāṅga</a:t>
+            </a:r>
+            <a:pPr algn="l" indent="0" marL="0">
+              <a:lnSpc>
+                <a:spcPts val="1680"/>
+              </a:lnSpc>
+              <a:spcBef>
+                <a:spcPts val="300"/>
+              </a:spcBef>
+              <a:spcAft>
+                <a:spcPts val="300"/>
+              </a:spcAft>
+              <a:buNone/>
+            </a:pPr>
+            <a:r>
+              <a:rPr lang="en-US" sz="1200" dirty="0">
+                <a:solidFill>
+                  <a:srgbClr val="1C2833"/>
+                </a:solidFill>
+                <a:latin typeface="Arial" pitchFamily="34" charset="0"/>
+                <a:ea typeface="Arial" pitchFamily="34" charset="-122"/>
+                <a:cs typeface="Arial" pitchFamily="34" charset="-120"/>
+              </a:rPr>
+              <a:t>? — No · Yes</a:t>
+            </a:r>
+            <a:endParaRPr lang="en-US" sz="1200" dirty="0"/>
+          </a:p>
+        </p:txBody>
+      </p:sp>
+      <p:sp>
+        <p:nvSpPr>
+          <p:cNvPr id="10" name="Text 8"/>
+          <p:cNvSpPr/>
+          <p:nvPr/>
+        </p:nvSpPr>
+        <p:spPr>
+          <a:xfrm>
+            <a:off x="634901" y="3211413"/>
+            <a:ext cx="8102798" cy="281880"/>
+          </a:xfrm>
+          <a:prstGeom prst="rect">
+            <a:avLst/>
+          </a:prstGeom>
+          <a:noFill/>
+          <a:ln/>
+        </p:spPr>
+        <p:txBody>
+          <a:bodyPr wrap="square" lIns="0" tIns="0" rIns="0" bIns="0" rtlCol="0" anchor="t"/>
+          <a:lstStyle/>
+          <a:p>
+            <a:pPr algn="l" marL="342900" indent="-342900">
+              <a:lnSpc>
+                <a:spcPts val="1620"/>
+              </a:lnSpc>
+              <a:spcAft>
+                <a:spcPts val="300"/>
+              </a:spcAft>
+              <a:buSzPct val="100000"/>
+              <a:buChar char="•"/>
+            </a:pPr>
+            <a:r>
+              <a:rPr lang="en-US" sz="1200" b="1" dirty="0">
+                <a:solidFill>
+                  <a:srgbClr val="1C2833"/>
+                </a:solidFill>
+                <a:latin typeface="Arial" pitchFamily="34" charset="0"/>
+                <a:ea typeface="Arial" pitchFamily="34" charset="-122"/>
+                <a:cs typeface="Arial" pitchFamily="34" charset="-120"/>
+              </a:rPr>
+              <a:t>What changes over millennia?</a:t>
+            </a:r>
+            <a:pPr algn="l" indent="0" marL="0">
+              <a:lnSpc>
+                <a:spcPts val="1620"/>
+              </a:lnSpc>
+              <a:spcAft>
+                <a:spcPts val="300"/>
+              </a:spcAft>
+              <a:buNone/>
+            </a:pPr>
+            <a:r>
+              <a:rPr lang="en-US" sz="1200" dirty="0">
+                <a:solidFill>
+                  <a:srgbClr val="1C2833"/>
+                </a:solidFill>
+                <a:latin typeface="Arial" pitchFamily="34" charset="0"/>
+                <a:ea typeface="Arial" pitchFamily="34" charset="-122"/>
+                <a:cs typeface="Arial" pitchFamily="34" charset="-120"/>
+              </a:rPr>
+              <a:t> — Star background drifts · Season alignment drifts</a:t>
+            </a:r>
+            <a:endParaRPr lang="en-US" sz="1200" dirty="0"/>
+          </a:p>
+        </p:txBody>
+      </p:sp>
+      <p:sp>
+        <p:nvSpPr>
+          <p:cNvPr id="11" name="Text 9"/>
+          <p:cNvSpPr/>
+          <p:nvPr/>
+        </p:nvSpPr>
+        <p:spPr>
+          <a:xfrm>
             <a:off x="406301" y="4434929"/>
             <a:ext cx="8498026" cy="213271"/>
           </a:xfrm>
